--- a/praesentationen/tag-5-automatisierung.pptx
+++ b/praesentationen/tag-5-automatisierung.pptx
@@ -113,20 +113,20 @@
   <p:extLst>
     <p:ext uri="{521415D9-36F7-43E2-AB2F-B90AF26B5E84}">
       <p14:sectionLst xmlns:p14="http://schemas.microsoft.com/office/powerpoint/2010/main">
-        <p14:section name="Start" id="{060551e5-0f62-b498-2485-754ca7bca7d1}">
+        <p14:section name="Start" id="{e0c0f827-3e03-56bd-88ef-b9a47ab46884}">
           <p14:sldIdLst>
             <p14:sldId id="256"/>
             <p14:sldId id="257"/>
           </p14:sldIdLst>
         </p14:section>
-        <p14:section name="Heute" id="{935cc601-581d-2e2e-669b-3a270e3fbe6b}">
+        <p14:section name="Heute" id="{d17acf72-4896-8ce3-d52c-ea0a62117a6e}">
           <p14:sldIdLst>
             <p14:sldId id="258"/>
             <p14:sldId id="259"/>
             <p14:sldId id="260"/>
           </p14:sldIdLst>
         </p14:section>
-        <p14:section name="Abschluss" id="{0ddf93e2-2c06-42f1-83e7-6e9257b1a2a1}">
+        <p14:section name="Abschluss" id="{1ea97ec0-0758-18fb-5690-cd1d449c6781}">
           <p14:sldIdLst>
             <p14:sldId id="261"/>
             <p14:sldId id="262"/>
@@ -3351,7 +3351,7 @@
                   <a:srgbClr val="27303A"/>
                 </a:solidFill>
               </a:rPr>
-              <a:t>Begründen (K4/K5)</a:t>
+              <a:t>Bicep und ARM (K2)</a:t>
             </a:r>
             <a:endParaRPr lang="en-US" sz="2000" dirty="0"/>
           </a:p>
@@ -3390,7 +3390,7 @@
                   <a:srgbClr val="27303A"/>
                 </a:solidFill>
               </a:rPr>
-              <a:t>Du vergleichst ARM und Bicep und begründest deine Lösung.</a:t>
+              <a:t>Du zeigst, dass aus einer Bicep-Datei ein ARM-Template entsteht.</a:t>
             </a:r>
             <a:endParaRPr lang="en-US" sz="1600" dirty="0"/>
           </a:p>

--- a/praesentationen/tag-5-automatisierung.pptx
+++ b/praesentationen/tag-5-automatisierung.pptx
@@ -113,20 +113,20 @@
   <p:extLst>
     <p:ext uri="{521415D9-36F7-43E2-AB2F-B90AF26B5E84}">
       <p14:sectionLst xmlns:p14="http://schemas.microsoft.com/office/powerpoint/2010/main">
-        <p14:section name="Start" id="{e0c0f827-3e03-56bd-88ef-b9a47ab46884}">
+        <p14:section name="Start" id="{939d6ad2-7ca6-952c-3ac1-cd9564dee72a}">
           <p14:sldIdLst>
             <p14:sldId id="256"/>
             <p14:sldId id="257"/>
           </p14:sldIdLst>
         </p14:section>
-        <p14:section name="Heute" id="{d17acf72-4896-8ce3-d52c-ea0a62117a6e}">
+        <p14:section name="Heute" id="{7e14c02d-c660-6394-245a-317c34cd6245}">
           <p14:sldIdLst>
             <p14:sldId id="258"/>
             <p14:sldId id="259"/>
             <p14:sldId id="260"/>
           </p14:sldIdLst>
         </p14:section>
-        <p14:section name="Abschluss" id="{1ea97ec0-0758-18fb-5690-cd1d449c6781}">
+        <p14:section name="Abschluss" id="{f30a8201-247a-9f1e-d6de-7afcc1593948}">
           <p14:sldIdLst>
             <p14:sldId id="261"/>
             <p14:sldId id="262"/>
@@ -2670,7 +2670,7 @@
                   <a:srgbClr val="6F6F6F"/>
                 </a:solidFill>
               </a:rPr>
-              <a:t>Genau dafür gibt es Infrastructure as Code.</a:t>
+              <a:t>Genau dafür gibt es Infrastruktur als Code (Infrastructure as Code).</a:t>
             </a:r>
             <a:endParaRPr lang="en-US" sz="1800" dirty="0"/>
           </a:p>
@@ -2931,7 +2931,7 @@
                   <a:srgbClr val="27303A"/>
                 </a:solidFill>
               </a:rPr>
-              <a:t>Du erklärst manuell, Skript und Infrastructure as Code.</a:t>
+              <a:t>Du erklärst den Unterschied: von Hand, Skript, Infrastruktur als Code.</a:t>
             </a:r>
             <a:endParaRPr lang="en-US" sz="1600" dirty="0"/>
           </a:p>
@@ -3853,7 +3853,7 @@
                             <a:srgbClr val="27303A"/>
                           </a:solidFill>
                         </a:rPr>
-                        <a:t>Rückblick der Woche · Infrastructure as Code, Bicep, cloud-init</a:t>
+                        <a:t>Rückblick der Woche · Infrastruktur als Code, Bicep, cloud-init</a:t>
                       </a:r>
                       <a:endParaRPr lang="en-US" sz="1700" dirty="0"/>
                     </a:p>

--- a/praesentationen/tag-5-automatisierung.pptx
+++ b/praesentationen/tag-5-automatisierung.pptx
@@ -113,20 +113,20 @@
   <p:extLst>
     <p:ext uri="{521415D9-36F7-43E2-AB2F-B90AF26B5E84}">
       <p14:sectionLst xmlns:p14="http://schemas.microsoft.com/office/powerpoint/2010/main">
-        <p14:section name="Start" id="{939d6ad2-7ca6-952c-3ac1-cd9564dee72a}">
+        <p14:section name="Start" id="{09e30cdf-5345-784a-36a7-ef8a8b9d55ce}">
           <p14:sldIdLst>
             <p14:sldId id="256"/>
             <p14:sldId id="257"/>
           </p14:sldIdLst>
         </p14:section>
-        <p14:section name="Heute" id="{7e14c02d-c660-6394-245a-317c34cd6245}">
+        <p14:section name="Heute" id="{fee905ab-7546-3afd-af97-9a9dfb78e4f0}">
           <p14:sldIdLst>
             <p14:sldId id="258"/>
             <p14:sldId id="259"/>
             <p14:sldId id="260"/>
           </p14:sldIdLst>
         </p14:section>
-        <p14:section name="Abschluss" id="{f30a8201-247a-9f1e-d6de-7afcc1593948}">
+        <p14:section name="Abschluss" id="{f54723e6-7d4f-a425-e471-5d1cb5847158}">
           <p14:sldIdLst>
             <p14:sldId id="261"/>
             <p14:sldId id="262"/>
@@ -1142,7 +1142,7 @@
     <p:bg>
       <p:bgPr>
         <a:solidFill>
-          <a:srgbClr val="27303A"/>
+          <a:srgbClr val="FFFFFF"/>
         </a:solidFill>
       </p:bgPr>
     </p:bg>
@@ -1162,7 +1162,7 @@
       </p:grpSpPr>
       <p:pic>
         <p:nvPicPr>
-          <p:cNvPr id="2" name="Image 0" descr="C:\Users\Thanam\AppData\Local\Temp\claude\c--Projekt-Trainings-azure-basics-training\a9e0bf4e-0d08-4082-a38a-5b8886538508\scratchpad\pptx\assets\logo-hell.png">    </p:cNvPr>
+          <p:cNvPr id="2" name="Image 0" descr="C:\Users\Thanam\AppData\Local\Temp\claude\c--Projekt-Trainings-azure-basics-training\a7a6b8eb-22f3-4b42-aecc-5af05d1502b1\scratchpad\folien\assets\logo-dunkel.png">    </p:cNvPr>
           <p:cNvPicPr>
             <a:picLocks noChangeAspect="1"/>
           </p:cNvPicPr>
@@ -1186,7 +1186,7 @@
       </p:pic>
       <p:pic>
         <p:nvPicPr>
-          <p:cNvPr id="3" name="Image 1" descr="C:\Users\Thanam\AppData\Local\Temp\claude\c--Projekt-Trainings-azure-basics-training\a9e0bf4e-0d08-4082-a38a-5b8886538508\scratchpad\pptx\assets\wolke.png">    </p:cNvPr>
+          <p:cNvPr id="3" name="Image 1" descr="C:\Users\Thanam\AppData\Local\Temp\claude\c--Projekt-Trainings-azure-basics-training\a7a6b8eb-22f3-4b42-aecc-5af05d1502b1\scratchpad\folien\assets\wolke.png">    </p:cNvPr>
           <p:cNvPicPr>
             <a:picLocks noChangeAspect="1"/>
           </p:cNvPicPr>
@@ -1234,7 +1234,7 @@
               <a:buNone/>
               <a:defRPr lang="en-US" sz="4400" b="1" dirty="0">
                 <a:solidFill>
-                  <a:srgbClr val="FFFFFF"/>
+                  <a:srgbClr val="27303A"/>
                 </a:solidFill>
               </a:defRPr>
             </a:lvl1pPr>
@@ -1273,7 +1273,7 @@
               <a:buNone/>
               <a:defRPr lang="en-US" sz="2000" dirty="0">
                 <a:solidFill>
-                  <a:srgbClr val="DEE2FB"/>
+                  <a:srgbClr val="006FAD"/>
                 </a:solidFill>
               </a:defRPr>
             </a:lvl1pPr>
@@ -1313,7 +1313,7 @@
             <a:r>
               <a:rPr lang="en-US" sz="1200" dirty="0">
                 <a:solidFill>
-                  <a:srgbClr val="DEE2FB"/>
+                  <a:srgbClr val="6F6F6F"/>
                 </a:solidFill>
               </a:rPr>
               <a:t>Kanton Zürich · ICT-Grundbildung · PAT Cloud Solutions</a:t>
@@ -1336,7 +1336,7 @@
     <p:bg>
       <p:bgPr>
         <a:solidFill>
-          <a:srgbClr val="006FAD"/>
+          <a:srgbClr val="F7F7F7"/>
         </a:solidFill>
       </p:bgPr>
     </p:bg>
@@ -1356,7 +1356,7 @@
       </p:grpSpPr>
       <p:pic>
         <p:nvPicPr>
-          <p:cNvPr id="2" name="Image 0" descr="C:\Users\Thanam\AppData\Local\Temp\claude\c--Projekt-Trainings-azure-basics-training\a9e0bf4e-0d08-4082-a38a-5b8886538508\scratchpad\pptx\assets\wolke.png">    </p:cNvPr>
+          <p:cNvPr id="2" name="Image 0" descr="C:\Users\Thanam\AppData\Local\Temp\claude\c--Projekt-Trainings-azure-basics-training\a7a6b8eb-22f3-4b42-aecc-5af05d1502b1\scratchpad\folien\assets\wolke.png">    </p:cNvPr>
           <p:cNvPicPr>
             <a:picLocks noChangeAspect="1"/>
           </p:cNvPicPr>
@@ -1380,7 +1380,7 @@
       </p:pic>
       <p:pic>
         <p:nvPicPr>
-          <p:cNvPr id="3" name="Image 1" descr="C:\Users\Thanam\AppData\Local\Temp\claude\c--Projekt-Trainings-azure-basics-training\a9e0bf4e-0d08-4082-a38a-5b8886538508\scratchpad\pptx\assets\logo-hell.png">    </p:cNvPr>
+          <p:cNvPr id="3" name="Image 1" descr="C:\Users\Thanam\AppData\Local\Temp\claude\c--Projekt-Trainings-azure-basics-training\a7a6b8eb-22f3-4b42-aecc-5af05d1502b1\scratchpad\folien\assets\logo-dunkel.png">    </p:cNvPr>
           <p:cNvPicPr>
             <a:picLocks noChangeAspect="1"/>
           </p:cNvPicPr>
@@ -1428,7 +1428,7 @@
               <a:buNone/>
               <a:defRPr lang="en-US" sz="4000" b="1" dirty="0">
                 <a:solidFill>
-                  <a:srgbClr val="FFFFFF"/>
+                  <a:srgbClr val="27303A"/>
                 </a:solidFill>
               </a:defRPr>
             </a:lvl1pPr>
@@ -1467,7 +1467,7 @@
               <a:buNone/>
               <a:defRPr lang="en-US" sz="2000" dirty="0">
                 <a:solidFill>
-                  <a:srgbClr val="DEE2FB"/>
+                  <a:srgbClr val="006FAD"/>
                 </a:solidFill>
               </a:defRPr>
             </a:lvl1pPr>
@@ -1514,7 +1514,7 @@
       </p:grpSpPr>
       <p:pic>
         <p:nvPicPr>
-          <p:cNvPr id="2" name="Image 0" descr="C:\Users\Thanam\AppData\Local\Temp\claude\c--Projekt-Trainings-azure-basics-training\a9e0bf4e-0d08-4082-a38a-5b8886538508\scratchpad\pptx\assets\logo-dunkel.png">    </p:cNvPr>
+          <p:cNvPr id="2" name="Image 0" descr="C:\Users\Thanam\AppData\Local\Temp\claude\c--Projekt-Trainings-azure-basics-training\a7a6b8eb-22f3-4b42-aecc-5af05d1502b1\scratchpad\folien\assets\logo-dunkel.png">    </p:cNvPr>
           <p:cNvPicPr>
             <a:picLocks noChangeAspect="1"/>
           </p:cNvPicPr>
@@ -1670,7 +1670,7 @@
     <p:bg>
       <p:bgPr>
         <a:solidFill>
-          <a:srgbClr val="27303A"/>
+          <a:srgbClr val="FFFFFF"/>
         </a:solidFill>
       </p:bgPr>
     </p:bg>
@@ -1690,7 +1690,7 @@
       </p:grpSpPr>
       <p:pic>
         <p:nvPicPr>
-          <p:cNvPr id="2" name="Image 0" descr="C:\Users\Thanam\AppData\Local\Temp\claude\c--Projekt-Trainings-azure-basics-training\a9e0bf4e-0d08-4082-a38a-5b8886538508\scratchpad\pptx\assets\logo-hell.png">    </p:cNvPr>
+          <p:cNvPr id="2" name="Image 0" descr="C:\Users\Thanam\AppData\Local\Temp\claude\c--Projekt-Trainings-azure-basics-training\a7a6b8eb-22f3-4b42-aecc-5af05d1502b1\scratchpad\folien\assets\logo-dunkel.png">    </p:cNvPr>
           <p:cNvPicPr>
             <a:picLocks noChangeAspect="1"/>
           </p:cNvPicPr>
@@ -1738,7 +1738,7 @@
               <a:buNone/>
               <a:defRPr lang="en-US" sz="4000" b="1" dirty="0">
                 <a:solidFill>
-                  <a:srgbClr val="FFFFFF"/>
+                  <a:srgbClr val="27303A"/>
                 </a:solidFill>
               </a:defRPr>
             </a:lvl1pPr>
@@ -1777,7 +1777,7 @@
               <a:buNone/>
               <a:defRPr lang="en-US" sz="2000" dirty="0">
                 <a:solidFill>
-                  <a:srgbClr val="DEE2FB"/>
+                  <a:srgbClr val="006FAD"/>
                 </a:solidFill>
               </a:defRPr>
             </a:lvl1pPr>
@@ -2170,7 +2170,7 @@
             <a:r>
               <a:rPr lang="en-US" sz="4400" b="1" dirty="0">
                 <a:solidFill>
-                  <a:srgbClr val="FFFFFF"/>
+                  <a:srgbClr val="27303A"/>
                 </a:solidFill>
               </a:rPr>
               <a:t>Tag 5: Automatisierung mit Bicep und cloud-init</a:t>
@@ -2208,7 +2208,7 @@
             <a:r>
               <a:rPr lang="en-US" sz="2000" dirty="0">
                 <a:solidFill>
-                  <a:srgbClr val="DEE2FB"/>
+                  <a:srgbClr val="006FAD"/>
                 </a:solidFill>
               </a:rPr>
               <a:t>Einführung in Cloud Computing mit Microsoft Azure</a:t>
@@ -2274,7 +2274,7 @@
                   <a:srgbClr val="27303A"/>
                 </a:solidFill>
               </a:rPr>
-              <a:t>Was hast du diese Woche von Hand gemacht?</a:t>
+              <a:t>Was hast du im Kurs von Hand gemacht?</a:t>
             </a:r>
             <a:endParaRPr lang="en-US" sz="3400" dirty="0"/>
           </a:p>
@@ -2307,7 +2307,7 @@
       </p:sp>
       <p:pic>
         <p:nvPicPr>
-          <p:cNvPr id="4" name="icon-FaServer" descr="C:\Users\Thanam\AppData\Local\Temp\claude\c--Projekt-Trainings-azure-basics-training\a9e0bf4e-0d08-4082-a38a-5b8886538508\scratchpad\pptx\assets\icons\FaServer.png">    </p:cNvPr>
+          <p:cNvPr id="4" name="icon-FaServer" descr="C:\Users\Thanam\AppData\Local\Temp\claude\c--Projekt-Trainings-azure-basics-training\a7a6b8eb-22f3-4b42-aecc-5af05d1502b1\scratchpad\folien\assets\icons\FaServer.png">    </p:cNvPr>
           <p:cNvPicPr>
             <a:picLocks noChangeAspect="1"/>
           </p:cNvPicPr>
@@ -2406,7 +2406,7 @@
       </p:sp>
       <p:pic>
         <p:nvPicPr>
-          <p:cNvPr id="7" name="icon-FaNetworkWired" descr="C:\Users\Thanam\AppData\Local\Temp\claude\c--Projekt-Trainings-azure-basics-training\a9e0bf4e-0d08-4082-a38a-5b8886538508\scratchpad\pptx\assets\icons\FaNetworkWired.png">    </p:cNvPr>
+          <p:cNvPr id="7" name="icon-FaNetworkWired" descr="C:\Users\Thanam\AppData\Local\Temp\claude\c--Projekt-Trainings-azure-basics-training\a7a6b8eb-22f3-4b42-aecc-5af05d1502b1\scratchpad\folien\assets\icons\FaNetworkWired.png">    </p:cNvPr>
           <p:cNvPicPr>
             <a:picLocks noChangeAspect="1"/>
           </p:cNvPicPr>
@@ -2505,7 +2505,7 @@
       </p:sp>
       <p:pic>
         <p:nvPicPr>
-          <p:cNvPr id="10" name="icon-FaWrench" descr="C:\Users\Thanam\AppData\Local\Temp\claude\c--Projekt-Trainings-azure-basics-training\a9e0bf4e-0d08-4082-a38a-5b8886538508\scratchpad\pptx\assets\icons\FaWrench.png">    </p:cNvPr>
+          <p:cNvPr id="10" name="icon-FaWrench" descr="C:\Users\Thanam\AppData\Local\Temp\claude\c--Projekt-Trainings-azure-basics-training\a7a6b8eb-22f3-4b42-aecc-5af05d1502b1\scratchpad\folien\assets\icons\FaWrench.png">    </p:cNvPr>
           <p:cNvPicPr>
             <a:picLocks noChangeAspect="1"/>
           </p:cNvPicPr>
@@ -2604,7 +2604,7 @@
       </p:sp>
       <p:pic>
         <p:nvPicPr>
-          <p:cNvPr id="13" name="icon-FaRedo" descr="C:\Users\Thanam\AppData\Local\Temp\claude\c--Projekt-Trainings-azure-basics-training\a9e0bf4e-0d08-4082-a38a-5b8886538508\scratchpad\pptx\assets\icons\FaRedo.png">    </p:cNvPr>
+          <p:cNvPr id="13" name="icon-FaRedo" descr="C:\Users\Thanam\AppData\Local\Temp\claude\c--Projekt-Trainings-azure-basics-training\a7a6b8eb-22f3-4b42-aecc-5af05d1502b1\scratchpad\folien\assets\icons\FaRedo.png">    </p:cNvPr>
           <p:cNvPicPr>
             <a:picLocks noChangeAspect="1"/>
           </p:cNvPicPr>
@@ -2838,7 +2838,7 @@
       </p:sp>
       <p:pic>
         <p:nvPicPr>
-          <p:cNvPr id="5" name="icon-FaCode" descr="C:\Users\Thanam\AppData\Local\Temp\claude\c--Projekt-Trainings-azure-basics-training\a9e0bf4e-0d08-4082-a38a-5b8886538508\scratchpad\pptx\assets\icons\FaCode.png">    </p:cNvPr>
+          <p:cNvPr id="5" name="icon-FaCode" descr="C:\Users\Thanam\AppData\Local\Temp\claude\c--Projekt-Trainings-azure-basics-training\a7a6b8eb-22f3-4b42-aecc-5af05d1502b1\scratchpad\folien\assets\icons\FaCode.png">    </p:cNvPr>
           <p:cNvPicPr>
             <a:picLocks noChangeAspect="1"/>
           </p:cNvPicPr>
@@ -2991,7 +2991,7 @@
       </p:sp>
       <p:pic>
         <p:nvPicPr>
-          <p:cNvPr id="10" name="icon-FaRocket" descr="C:\Users\Thanam\AppData\Local\Temp\claude\c--Projekt-Trainings-azure-basics-training\a9e0bf4e-0d08-4082-a38a-5b8886538508\scratchpad\pptx\assets\icons\FaRocket.png">    </p:cNvPr>
+          <p:cNvPr id="10" name="icon-FaRocket" descr="C:\Users\Thanam\AppData\Local\Temp\claude\c--Projekt-Trainings-azure-basics-training\a7a6b8eb-22f3-4b42-aecc-5af05d1502b1\scratchpad\folien\assets\icons\FaRocket.png">    </p:cNvPr>
           <p:cNvPicPr>
             <a:picLocks noChangeAspect="1"/>
           </p:cNvPicPr>
@@ -3144,7 +3144,7 @@
       </p:sp>
       <p:pic>
         <p:nvPicPr>
-          <p:cNvPr id="15" name="icon-FaFileCode" descr="C:\Users\Thanam\AppData\Local\Temp\claude\c--Projekt-Trainings-azure-basics-training\a9e0bf4e-0d08-4082-a38a-5b8886538508\scratchpad\pptx\assets\icons\FaFileCode.png">    </p:cNvPr>
+          <p:cNvPr id="15" name="icon-FaFileCode" descr="C:\Users\Thanam\AppData\Local\Temp\claude\c--Projekt-Trainings-azure-basics-training\a7a6b8eb-22f3-4b42-aecc-5af05d1502b1\scratchpad\folien\assets\icons\FaFileCode.png">    </p:cNvPr>
           <p:cNvPicPr>
             <a:picLocks noChangeAspect="1"/>
           </p:cNvPicPr>
@@ -3297,7 +3297,7 @@
       </p:sp>
       <p:pic>
         <p:nvPicPr>
-          <p:cNvPr id="20" name="icon-FaStar" descr="C:\Users\Thanam\AppData\Local\Temp\claude\c--Projekt-Trainings-azure-basics-training\a9e0bf4e-0d08-4082-a38a-5b8886538508\scratchpad\pptx\assets\icons\FaStar.png">    </p:cNvPr>
+          <p:cNvPr id="20" name="icon-FaStar" descr="C:\Users\Thanam\AppData\Local\Temp\claude\c--Projekt-Trainings-azure-basics-training\a7a6b8eb-22f3-4b42-aecc-5af05d1502b1\scratchpad\folien\assets\icons\FaStar.png">    </p:cNvPr>
           <p:cNvPicPr>
             <a:picLocks noChangeAspect="1"/>
           </p:cNvPicPr>
@@ -3853,7 +3853,7 @@
                             <a:srgbClr val="27303A"/>
                           </a:solidFill>
                         </a:rPr>
-                        <a:t>Rückblick der Woche · Infrastruktur als Code, Bicep, cloud-init</a:t>
+                        <a:t>Rückblick auf den Kurs · Infrastruktur als Code, Bicep, cloud-init</a:t>
                       </a:r>
                       <a:endParaRPr lang="en-US" sz="1700" dirty="0"/>
                     </a:p>
@@ -4992,7 +4992,7 @@
       </p:sp>
       <p:pic>
         <p:nvPicPr>
-          <p:cNvPr id="5" name="icon-FaFileCode" descr="C:\Users\Thanam\AppData\Local\Temp\claude\c--Projekt-Trainings-azure-basics-training\a9e0bf4e-0d08-4082-a38a-5b8886538508\scratchpad\pptx\assets\icons\FaFileCode.png">    </p:cNvPr>
+          <p:cNvPr id="5" name="icon-FaFileCode" descr="C:\Users\Thanam\AppData\Local\Temp\claude\c--Projekt-Trainings-azure-basics-training\a7a6b8eb-22f3-4b42-aecc-5af05d1502b1\scratchpad\folien\assets\icons\FaFileCode.png">    </p:cNvPr>
           <p:cNvPicPr>
             <a:picLocks noChangeAspect="1"/>
           </p:cNvPicPr>
@@ -5145,7 +5145,7 @@
       </p:sp>
       <p:pic>
         <p:nvPicPr>
-          <p:cNvPr id="10" name="icon-FaClipboardList" descr="C:\Users\Thanam\AppData\Local\Temp\claude\c--Projekt-Trainings-azure-basics-training\a9e0bf4e-0d08-4082-a38a-5b8886538508\scratchpad\pptx\assets\icons\FaClipboardList.png">    </p:cNvPr>
+          <p:cNvPr id="10" name="icon-FaClipboardList" descr="C:\Users\Thanam\AppData\Local\Temp\claude\c--Projekt-Trainings-azure-basics-training\a7a6b8eb-22f3-4b42-aecc-5af05d1502b1\scratchpad\folien\assets\icons\FaClipboardList.png">    </p:cNvPr>
           <p:cNvPicPr>
             <a:picLocks noChangeAspect="1"/>
           </p:cNvPicPr>
@@ -5298,7 +5298,7 @@
       </p:sp>
       <p:pic>
         <p:nvPicPr>
-          <p:cNvPr id="15" name="icon-FaChartLine" descr="C:\Users\Thanam\AppData\Local\Temp\claude\c--Projekt-Trainings-azure-basics-training\a9e0bf4e-0d08-4082-a38a-5b8886538508\scratchpad\pptx\assets\icons\FaChartLine.png">    </p:cNvPr>
+          <p:cNvPr id="15" name="icon-FaChartLine" descr="C:\Users\Thanam\AppData\Local\Temp\claude\c--Projekt-Trainings-azure-basics-training\a7a6b8eb-22f3-4b42-aecc-5af05d1502b1\scratchpad\folien\assets\icons\FaChartLine.png">    </p:cNvPr>
           <p:cNvPicPr>
             <a:picLocks noChangeAspect="1"/>
           </p:cNvPicPr>
@@ -5559,7 +5559,7 @@
       </p:sp>
       <p:pic>
         <p:nvPicPr>
-          <p:cNvPr id="5" name="icon-FaTrashAlt" descr="C:\Users\Thanam\AppData\Local\Temp\claude\c--Projekt-Trainings-azure-basics-training\a9e0bf4e-0d08-4082-a38a-5b8886538508\scratchpad\pptx\assets\icons\FaTrashAlt.png">    </p:cNvPr>
+          <p:cNvPr id="5" name="icon-FaTrashAlt" descr="C:\Users\Thanam\AppData\Local\Temp\claude\c--Projekt-Trainings-azure-basics-training\a7a6b8eb-22f3-4b42-aecc-5af05d1502b1\scratchpad\folien\assets\icons\FaTrashAlt.png">    </p:cNvPr>
           <p:cNvPicPr>
             <a:picLocks noChangeAspect="1"/>
           </p:cNvPicPr>
@@ -5652,7 +5652,7 @@
                   <a:srgbClr val="27303A"/>
                 </a:solidFill>
               </a:rPr>
-              <a:t>Alle Ressourcengruppen der Woche löschen: az group list -o table</a:t>
+              <a:t>Alle Ressourcengruppen des Kurses löschen: az group list -o table</a:t>
             </a:r>
             <a:endParaRPr lang="en-US" sz="1600" dirty="0"/>
           </a:p>
@@ -5712,7 +5712,7 @@
       </p:sp>
       <p:pic>
         <p:nvPicPr>
-          <p:cNvPr id="10" name="icon-FaPencilAlt" descr="C:\Users\Thanam\AppData\Local\Temp\claude\c--Projekt-Trainings-azure-basics-training\a9e0bf4e-0d08-4082-a38a-5b8886538508\scratchpad\pptx\assets\icons\FaPencilAlt.png">    </p:cNvPr>
+          <p:cNvPr id="10" name="icon-FaPencilAlt" descr="C:\Users\Thanam\AppData\Local\Temp\claude\c--Projekt-Trainings-azure-basics-training\a7a6b8eb-22f3-4b42-aecc-5af05d1502b1\scratchpad\folien\assets\icons\FaPencilAlt.png">    </p:cNvPr>
           <p:cNvPicPr>
             <a:picLocks noChangeAspect="1"/>
           </p:cNvPicPr>
@@ -5865,7 +5865,7 @@
       </p:sp>
       <p:pic>
         <p:nvPicPr>
-          <p:cNvPr id="15" name="icon-FaGraduationCap" descr="C:\Users\Thanam\AppData\Local\Temp\claude\c--Projekt-Trainings-azure-basics-training\a9e0bf4e-0d08-4082-a38a-5b8886538508\scratchpad\pptx\assets\icons\FaGraduationCap.png">    </p:cNvPr>
+          <p:cNvPr id="15" name="icon-FaGraduationCap" descr="C:\Users\Thanam\AppData\Local\Temp\claude\c--Projekt-Trainings-azure-basics-training\a7a6b8eb-22f3-4b42-aecc-5af05d1502b1\scratchpad\folien\assets\icons\FaGraduationCap.png">    </p:cNvPr>
           <p:cNvPicPr>
             <a:picLocks noChangeAspect="1"/>
           </p:cNvPicPr>
@@ -6063,7 +6063,7 @@
             <a:r>
               <a:rPr lang="en-US" sz="4000" b="1" dirty="0">
                 <a:solidFill>
-                  <a:srgbClr val="FFFFFF"/>
+                  <a:srgbClr val="27303A"/>
                 </a:solidFill>
               </a:rPr>
               <a:t>Danke!</a:t>
@@ -6101,7 +6101,7 @@
             <a:r>
               <a:rPr lang="en-US" sz="2000" dirty="0">
                 <a:solidFill>
-                  <a:srgbClr val="DEE2FB"/>
+                  <a:srgbClr val="006FAD"/>
                 </a:solidFill>
               </a:rPr>
               <a:t>PAT Cloud Solutions · patcloudsolutions.ch</a:t>
